--- a/report & slides/OCUSMAFAIT_presentation_Cloud.pptx
+++ b/report & slides/OCUSMAFAIT_presentation_Cloud.pptx
@@ -3499,16 +3499,32 @@
         <a:bodyPr/>
         <a:lstStyle/>
         <a:p>
-          <a:pPr rtl="0">
+          <a:pPr>
             <a:lnSpc>
               <a:spcPct val="100000"/>
             </a:lnSpc>
+            <a:buNone/>
           </a:pPr>
           <a:r>
-            <a:rPr lang="en-US" noProof="0"/>
-            <a:t>Small files (50KB) handled efficiently (~15ms response)</a:t>
+            <a:rPr lang="en-US" dirty="0"/>
+            <a:t>Medium files (5MB): </a:t>
           </a:r>
-          <a:endParaRPr lang="en-AE"/>
+          <a:br>
+            <a:rPr lang="en-US" dirty="0"/>
+          </a:br>
+          <a:r>
+            <a:rPr lang="en-US" dirty="0"/>
+            <a:t>median response ~44–49 </a:t>
+          </a:r>
+          <a:r>
+            <a:rPr lang="en-US" dirty="0" err="1"/>
+            <a:t>ms</a:t>
+          </a:r>
+          <a:r>
+            <a:rPr lang="en-US" dirty="0"/>
+            <a:t> at 10 concurrent users </a:t>
+          </a:r>
+          <a:endParaRPr lang="en-AE" dirty="0"/>
         </a:p>
       </dgm:t>
     </dgm:pt>
@@ -3552,11 +3568,19 @@
           </a:r>
           <a:r>
             <a:rPr lang="en-US" b="1" noProof="0" dirty="0"/>
-            <a:t>scales well</a:t>
+            <a:t>handles</a:t>
           </a:r>
           <a:r>
             <a:rPr lang="en-US" noProof="0" dirty="0"/>
-            <a:t> for moderate concurrent load</a:t>
+            <a:t> </a:t>
+          </a:r>
+          <a:r>
+            <a:rPr lang="en-US" b="1" noProof="0" dirty="0"/>
+            <a:t>well </a:t>
+          </a:r>
+          <a:r>
+            <a:rPr lang="en-US" noProof="0" dirty="0"/>
+            <a:t>moderate concurrent load</a:t>
           </a:r>
           <a:endParaRPr lang="en-AE" dirty="0"/>
         </a:p>
@@ -3598,7 +3622,15 @@
           </a:pPr>
           <a:r>
             <a:rPr lang="en-US" noProof="0" dirty="0"/>
-            <a:t>Performance is consistent for any small number of users</a:t>
+            <a:t>Load testing </a:t>
+          </a:r>
+          <a:r>
+            <a:rPr lang="en-US" noProof="0"/>
+            <a:t>shows that performance </a:t>
+          </a:r>
+          <a:r>
+            <a:rPr lang="en-US" noProof="0" dirty="0"/>
+            <a:t>is consistent for any small number of users</a:t>
           </a:r>
           <a:endParaRPr lang="en-AE" dirty="0">
             <a:solidFill>
@@ -5126,12 +5158,12 @@
         </a:fontRef>
       </dsp:style>
       <dsp:txBody>
-        <a:bodyPr spcFirstLastPara="0" vert="horz" wrap="square" lIns="565775" tIns="50800" rIns="50800" bIns="50800" numCol="1" spcCol="1270" anchor="ctr" anchorCtr="0">
+        <a:bodyPr spcFirstLastPara="0" vert="horz" wrap="square" lIns="565775" tIns="50800" rIns="50800" bIns="50800" numCol="1" spcCol="1270" rtlCol="0" anchor="ctr" anchorCtr="0">
           <a:noAutofit/>
         </a:bodyPr>
         <a:lstStyle/>
         <a:p>
-          <a:pPr marL="0" lvl="0" indent="0" algn="l" defTabSz="889000" rtl="0">
+          <a:pPr marL="0" lvl="0" indent="0" algn="l" defTabSz="889000">
             <a:lnSpc>
               <a:spcPct val="100000"/>
             </a:lnSpc>
@@ -5144,10 +5176,25 @@
             <a:buNone/>
           </a:pPr>
           <a:r>
-            <a:rPr lang="en-US" sz="2000" kern="1200" noProof="0"/>
-            <a:t>Small files (50KB) handled efficiently (~15ms response)</a:t>
+            <a:rPr lang="en-US" sz="2000" kern="1200" dirty="0"/>
+            <a:t>Medium files (5MB): </a:t>
           </a:r>
-          <a:endParaRPr lang="en-AE" sz="2000" kern="1200"/>
+          <a:br>
+            <a:rPr lang="en-US" sz="2000" kern="1200" dirty="0"/>
+          </a:br>
+          <a:r>
+            <a:rPr lang="en-US" sz="2000" kern="1200" dirty="0"/>
+            <a:t>median response ~44–49 </a:t>
+          </a:r>
+          <a:r>
+            <a:rPr lang="en-US" sz="2000" kern="1200" dirty="0" err="1"/>
+            <a:t>ms</a:t>
+          </a:r>
+          <a:r>
+            <a:rPr lang="en-US" sz="2000" kern="1200" dirty="0"/>
+            <a:t> at 10 concurrent users </a:t>
+          </a:r>
+          <a:endParaRPr lang="en-AE" sz="2000" kern="1200" dirty="0"/>
         </a:p>
       </dsp:txBody>
       <dsp:txXfrm>
@@ -5289,11 +5336,19 @@
           </a:r>
           <a:r>
             <a:rPr lang="en-US" sz="2000" b="1" kern="1200" noProof="0" dirty="0"/>
-            <a:t>scales well</a:t>
+            <a:t>handles</a:t>
           </a:r>
           <a:r>
             <a:rPr lang="en-US" sz="2000" kern="1200" noProof="0" dirty="0"/>
-            <a:t> for moderate concurrent load</a:t>
+            <a:t> </a:t>
+          </a:r>
+          <a:r>
+            <a:rPr lang="en-US" sz="2000" b="1" kern="1200" noProof="0" dirty="0"/>
+            <a:t>well </a:t>
+          </a:r>
+          <a:r>
+            <a:rPr lang="en-US" sz="2000" kern="1200" noProof="0" dirty="0"/>
+            <a:t>moderate concurrent load</a:t>
           </a:r>
           <a:endParaRPr lang="en-AE" sz="2000" kern="1200" dirty="0"/>
         </a:p>
@@ -5433,7 +5488,15 @@
           </a:pPr>
           <a:r>
             <a:rPr lang="en-US" sz="2000" kern="1200" noProof="0" dirty="0"/>
-            <a:t>Performance is consistent for any small number of users</a:t>
+            <a:t>Load testing </a:t>
+          </a:r>
+          <a:r>
+            <a:rPr lang="en-US" sz="2000" kern="1200" noProof="0"/>
+            <a:t>shows that performance </a:t>
+          </a:r>
+          <a:r>
+            <a:rPr lang="en-US" sz="2000" kern="1200" noProof="0" dirty="0"/>
+            <a:t>is consistent for any small number of users</a:t>
           </a:r>
           <a:endParaRPr lang="en-AE" sz="2000" kern="1200" dirty="0">
             <a:solidFill>
@@ -15971,7 +16034,7 @@
             <a:pPr rtl="0"/>
             <a:fld id="{C0FA3576-2E34-44A5-91FF-3C53AC3DA648}" type="datetime1">
               <a:rPr lang="it-IT" smtClean="0"/>
-              <a:t>25/05/2026</a:t>
+              <a:t>09/lug/2026</a:t>
             </a:fld>
             <a:endParaRPr lang="it-IT"/>
           </a:p>
@@ -16153,7 +16216,7 @@
             <a:fld id="{F8F21FEC-DF32-4E90-A279-29D5C0BB0773}" type="datetime1">
               <a:rPr lang="it-IT" smtClean="0"/>
               <a:pPr/>
-              <a:t>25/05/2026</a:t>
+              <a:t>09/lug/2026</a:t>
             </a:fld>
             <a:endParaRPr lang="it-IT" dirty="0"/>
           </a:p>
@@ -17313,7 +17376,7 @@
             <a:pPr rtl="0"/>
             <a:fld id="{87A23933-3F77-4C59-A775-45E2435C8368}" type="datetime1">
               <a:rPr lang="it-IT" noProof="0" smtClean="0"/>
-              <a:t>25/05/2026</a:t>
+              <a:t>09/lug/2026</a:t>
             </a:fld>
             <a:endParaRPr lang="it-IT" noProof="0"/>
           </a:p>
@@ -17587,7 +17650,7 @@
             <a:pPr rtl="0"/>
             <a:fld id="{4B4ECE9F-4108-4829-8F23-DFA9C926965D}" type="datetime1">
               <a:rPr lang="it-IT" noProof="0" smtClean="0"/>
-              <a:t>25/05/2026</a:t>
+              <a:t>09/lug/2026</a:t>
             </a:fld>
             <a:endParaRPr lang="it-IT" noProof="0"/>
           </a:p>
@@ -17834,7 +17897,7 @@
             <a:pPr rtl="0"/>
             <a:fld id="{2AB59B6B-A2EF-4B30-AEF7-A3091D0F5449}" type="datetime1">
               <a:rPr lang="it-IT" noProof="0" smtClean="0"/>
-              <a:t>25/05/2026</a:t>
+              <a:t>09/lug/2026</a:t>
             </a:fld>
             <a:endParaRPr lang="it-IT" noProof="0" dirty="0"/>
           </a:p>
@@ -18086,7 +18149,7 @@
             <a:pPr rtl="0"/>
             <a:fld id="{7F3FB14C-AC96-42E5-BE0B-73EFAA1A7EA7}" type="datetime1">
               <a:rPr lang="it-IT" noProof="0" smtClean="0"/>
-              <a:t>25/05/2026</a:t>
+              <a:t>09/lug/2026</a:t>
             </a:fld>
             <a:endParaRPr lang="it-IT" noProof="0"/>
           </a:p>
@@ -18405,7 +18468,7 @@
             <a:pPr rtl="0"/>
             <a:fld id="{76327E91-20FF-43F1-A337-75953C73E7D7}" type="datetime1">
               <a:rPr lang="it-IT" noProof="0" smtClean="0"/>
-              <a:t>25/05/2026</a:t>
+              <a:t>09/lug/2026</a:t>
             </a:fld>
             <a:endParaRPr lang="it-IT" noProof="0"/>
           </a:p>
@@ -18719,7 +18782,7 @@
             <a:pPr rtl="0"/>
             <a:fld id="{9EDCB701-B7F2-4988-9CFB-241C1D412354}" type="datetime1">
               <a:rPr lang="it-IT" noProof="0" smtClean="0"/>
-              <a:t>25/05/2026</a:t>
+              <a:t>09/lug/2026</a:t>
             </a:fld>
             <a:endParaRPr lang="it-IT" noProof="0"/>
           </a:p>
@@ -19153,7 +19216,7 @@
             <a:pPr rtl="0"/>
             <a:fld id="{4B9B0459-76CC-4B94-A6C6-908B17D42BC8}" type="datetime1">
               <a:rPr lang="it-IT" noProof="0" smtClean="0"/>
-              <a:t>25/05/2026</a:t>
+              <a:t>09/lug/2026</a:t>
             </a:fld>
             <a:endParaRPr lang="it-IT" noProof="0"/>
           </a:p>
@@ -19252,7 +19315,7 @@
             <a:pPr rtl="0"/>
             <a:fld id="{62D572E4-8572-44CF-B6FA-B15ECB2B0691}" type="datetime1">
               <a:rPr lang="it-IT" noProof="0" smtClean="0"/>
-              <a:t>25/05/2026</a:t>
+              <a:t>09/lug/2026</a:t>
             </a:fld>
             <a:endParaRPr lang="it-IT" noProof="0"/>
           </a:p>
@@ -19426,7 +19489,7 @@
             <a:pPr rtl="0"/>
             <a:fld id="{5F266B29-8DDF-40ED-AC5D-ED73AC5A6521}" type="datetime1">
               <a:rPr lang="it-IT" noProof="0" smtClean="0"/>
-              <a:t>25/05/2026</a:t>
+              <a:t>09/lug/2026</a:t>
             </a:fld>
             <a:endParaRPr lang="it-IT" noProof="0"/>
           </a:p>
@@ -19816,7 +19879,7 @@
             <a:pPr rtl="0"/>
             <a:fld id="{4CFC7787-2DFD-4221-B49C-354C37128239}" type="datetime1">
               <a:rPr lang="it-IT" noProof="0" smtClean="0"/>
-              <a:t>25/05/2026</a:t>
+              <a:t>09/lug/2026</a:t>
             </a:fld>
             <a:endParaRPr lang="it-IT" noProof="0"/>
           </a:p>
@@ -20111,7 +20174,7 @@
             <a:pPr rtl="0"/>
             <a:fld id="{D3F07A8F-C5D3-4128-B052-E864993A59CE}" type="datetime1">
               <a:rPr lang="it-IT" noProof="0" smtClean="0"/>
-              <a:t>25/05/2026</a:t>
+              <a:t>09/lug/2026</a:t>
             </a:fld>
             <a:endParaRPr lang="it-IT" noProof="0"/>
           </a:p>
@@ -20325,7 +20388,7 @@
             <a:pPr rtl="0"/>
             <a:fld id="{A36BACEF-F5E2-445B-BCCF-A68C06C41D7B}" type="datetime1">
               <a:rPr lang="it-IT" noProof="0" smtClean="0"/>
-              <a:t>25/05/2026</a:t>
+              <a:t>09/lug/2026</a:t>
             </a:fld>
             <a:endParaRPr lang="it-IT" noProof="0" dirty="0"/>
           </a:p>
@@ -21423,7 +21486,7 @@
                   </a:schemeClr>
                 </a:solidFill>
               </a:rPr>
-              <a:t>Cloud Computing Basic Course - May 2026</a:t>
+              <a:t>Omar Cusma fait - Cloud Computing Basic Course – 2023/2024</a:t>
             </a:r>
           </a:p>
         </p:txBody>
@@ -21836,7 +21899,7 @@
             <p:ph idx="1"/>
             <p:extLst>
               <p:ext uri="{D42A27DB-BD31-4B8C-83A1-F6EECF244321}">
-                <p14:modId xmlns:p14="http://schemas.microsoft.com/office/powerpoint/2010/main" val="743752688"/>
+                <p14:modId xmlns:p14="http://schemas.microsoft.com/office/powerpoint/2010/main" val="3026768250"/>
               </p:ext>
             </p:extLst>
           </p:nvPr>
@@ -23644,10 +23707,10 @@
       </p:sp>
       <p:pic>
         <p:nvPicPr>
-          <p:cNvPr id="8" name="Picture 7">
+          <p:cNvPr id="11" name="Picture 10">
             <a:extLst>
               <a:ext uri="{FF2B5EF4-FFF2-40B4-BE49-F238E27FC236}">
-                <a16:creationId xmlns:a16="http://schemas.microsoft.com/office/drawing/2014/main" id="{4D411405-073D-C17A-D0B9-121357283B8E}"/>
+                <a16:creationId xmlns:a16="http://schemas.microsoft.com/office/drawing/2014/main" id="{A2B46EE9-7E06-659A-3BA1-908DB4ED35D4}"/>
               </a:ext>
             </a:extLst>
           </p:cNvPr>
@@ -23658,20 +23721,18 @@
         </p:nvPicPr>
         <p:blipFill>
           <a:blip r:embed="rId2"/>
-          <a:srcRect b="13937"/>
           <a:stretch>
             <a:fillRect/>
           </a:stretch>
         </p:blipFill>
         <p:spPr>
           <a:xfrm>
-            <a:off x="581192" y="2180496"/>
-            <a:ext cx="11029615" cy="3678303"/>
+            <a:off x="947737" y="2185445"/>
+            <a:ext cx="10296525" cy="3695700"/>
           </a:xfrm>
           <a:prstGeom prst="rect">
             <a:avLst/>
           </a:prstGeom>
-          <a:noFill/>
         </p:spPr>
       </p:pic>
     </p:spTree>
@@ -23752,8 +23813,8 @@
         </p:nvSpPr>
         <p:spPr>
           <a:xfrm>
-            <a:off x="254000" y="702156"/>
-            <a:ext cx="4495800" cy="1837844"/>
+            <a:off x="-457199" y="934588"/>
+            <a:ext cx="3964674" cy="1482582"/>
           </a:xfrm>
         </p:spPr>
         <p:txBody>
@@ -23794,7 +23855,7 @@
         </p:nvSpPr>
         <p:spPr>
           <a:xfrm>
-            <a:off x="7454900" y="1009650"/>
+            <a:off x="7454900" y="1057418"/>
             <a:ext cx="4451350" cy="5676900"/>
           </a:xfrm>
         </p:spPr>
@@ -23964,6 +24025,21 @@
               </a:rPr>
             </a:br>
             <a:r>
+              <a:rPr lang="en-US" sz="2000" dirty="0">
+                <a:solidFill>
+                  <a:srgbClr val="00679E"/>
+                </a:solidFill>
+              </a:rPr>
+              <a:t>- ✓ Sign-up, log out</a:t>
+            </a:r>
+            <a:br>
+              <a:rPr lang="en-US" sz="2000" noProof="0" dirty="0">
+                <a:solidFill>
+                  <a:srgbClr val="00679E"/>
+                </a:solidFill>
+              </a:rPr>
+            </a:br>
+            <a:r>
               <a:rPr lang="en-US" sz="2000" noProof="0" dirty="0">
                 <a:solidFill>
                   <a:srgbClr val="00679E"/>
@@ -24030,8 +24106,8 @@
         </p:nvSpPr>
         <p:spPr>
           <a:xfrm>
-            <a:off x="349250" y="6155844"/>
-            <a:ext cx="3676650" cy="523220"/>
+            <a:off x="-1576316" y="6415156"/>
+            <a:ext cx="5602216" cy="307777"/>
           </a:xfrm>
           <a:prstGeom prst="rect">
             <a:avLst/>
@@ -24053,18 +24129,8 @@
                   </a:schemeClr>
                 </a:solidFill>
               </a:rPr>
-              <a:t>To log in, hop on </a:t>
+              <a:t>To log in, visit </a:t>
             </a:r>
-            <a:br>
-              <a:rPr lang="en-US" sz="1400" dirty="0">
-                <a:solidFill>
-                  <a:schemeClr val="tx1">
-                    <a:lumMod val="75000"/>
-                    <a:lumOff val="25000"/>
-                  </a:schemeClr>
-                </a:solidFill>
-              </a:rPr>
-            </a:br>
             <a:r>
               <a:rPr lang="en-US" sz="1400" dirty="0">
                 <a:solidFill>
@@ -24179,7 +24245,7 @@
         </p:nvGrpSpPr>
         <p:grpSpPr>
           <a:xfrm>
-            <a:off x="2413502" y="3825578"/>
+            <a:off x="2493012" y="3825578"/>
             <a:ext cx="7118755" cy="1200329"/>
             <a:chOff x="2413502" y="3825578"/>
             <a:chExt cx="7118755" cy="1200329"/>
@@ -24229,7 +24295,7 @@
               </a:br>
               <a:r>
                 <a:rPr lang="en-US" dirty="0"/>
-                <a:t>- Scrape interval: 15-30 seconds</a:t>
+                <a:t>- Scrape interval: 30 seconds</a:t>
               </a:r>
               <a:br>
                 <a:rPr lang="en-US" dirty="0"/>
@@ -24376,7 +24442,7 @@
         </p:nvGrpSpPr>
         <p:grpSpPr>
           <a:xfrm>
-            <a:off x="1989073" y="5291823"/>
+            <a:off x="2068583" y="5291823"/>
             <a:ext cx="7575538" cy="1258459"/>
             <a:chOff x="1989073" y="5291823"/>
             <a:chExt cx="7575538" cy="1258459"/>
@@ -24578,7 +24644,7 @@
         </p:nvGrpSpPr>
         <p:grpSpPr>
           <a:xfrm>
-            <a:off x="1690917" y="2345353"/>
+            <a:off x="1770427" y="2345353"/>
             <a:ext cx="7576154" cy="1214308"/>
             <a:chOff x="1690917" y="2345353"/>
             <a:chExt cx="7576154" cy="1214308"/>
@@ -24958,7 +25024,7 @@
           <a:lstStyle/>
           <a:p>
             <a:r>
-              <a:rPr lang="en-AE" sz="3200" dirty="0"/>
+              <a:rPr lang="en-AE" sz="3600" dirty="0"/>
               <a:t>Load-testing results: 50MB</a:t>
             </a:r>
           </a:p>

--- a/report & slides/OCUSMAFAIT_presentation_Cloud.pptx
+++ b/report & slides/OCUSMAFAIT_presentation_Cloud.pptx
@@ -5158,7 +5158,7 @@
         </a:fontRef>
       </dsp:style>
       <dsp:txBody>
-        <a:bodyPr spcFirstLastPara="0" vert="horz" wrap="square" lIns="565775" tIns="50800" rIns="50800" bIns="50800" numCol="1" spcCol="1270" rtlCol="0" anchor="ctr" anchorCtr="0">
+        <a:bodyPr spcFirstLastPara="0" vert="horz" wrap="square" lIns="565775" tIns="50800" rIns="50800" bIns="50800" numCol="1" spcCol="1270" anchor="ctr" anchorCtr="0">
           <a:noAutofit/>
         </a:bodyPr>
         <a:lstStyle/>
@@ -23813,8 +23813,8 @@
         </p:nvSpPr>
         <p:spPr>
           <a:xfrm>
-            <a:off x="-457199" y="934588"/>
-            <a:ext cx="3964674" cy="1482582"/>
+            <a:off x="174170" y="976527"/>
+            <a:ext cx="3507475" cy="1482582"/>
           </a:xfrm>
         </p:spPr>
         <p:txBody>
@@ -24106,8 +24106,8 @@
         </p:nvSpPr>
         <p:spPr>
           <a:xfrm>
-            <a:off x="-1576316" y="6415156"/>
-            <a:ext cx="5602216" cy="307777"/>
+            <a:off x="232229" y="6400800"/>
+            <a:ext cx="3793670" cy="307777"/>
           </a:xfrm>
           <a:prstGeom prst="rect">
             <a:avLst/>
